--- a/presentation/Karez-2.0-Hackathon-Presentation.pptx
+++ b/presentation/Karez-2.0-Hackathon-Presentation.pptx
@@ -3186,7 +3186,7 @@
                 <a:ea typeface="Calibri" pitchFamily="34" charset="-122"/>
                 <a:cs typeface="Calibri" pitchFamily="34" charset="-120"/>
               </a:rPr>
-              <a:t>[INSERT: GitHub URL]</a:t>
+              <a:t>github.com/Hassam-Taimuri/karez-2.0</a:t>
             </a:r>
             <a:endParaRPr lang="en-US" sz="1200" dirty="0"/>
           </a:p>

--- a/presentation/Karez-2.0-Hackathon-Presentation.pptx
+++ b/presentation/Karez-2.0-Hackathon-Presentation.pptx
@@ -3386,7 +3386,7 @@
                 <a:ea typeface="Calibri" pitchFamily="34" charset="-122"/>
                 <a:cs typeface="Calibri" pitchFamily="34" charset="-120"/>
               </a:rPr>
-              <a:t>[INSERT: demo email / password]</a:t>
+              <a:t>Provided with the submission entry</a:t>
             </a:r>
             <a:endParaRPr lang="en-US" sz="1200" dirty="0"/>
           </a:p>

--- a/presentation/Karez-2.0-Hackathon-Presentation.pptx
+++ b/presentation/Karez-2.0-Hackathon-Presentation.pptx
@@ -3286,7 +3286,7 @@
                 <a:ea typeface="Calibri" pitchFamily="34" charset="-122"/>
                 <a:cs typeface="Calibri" pitchFamily="34" charset="-120"/>
               </a:rPr>
-              <a:t>[INSERT: deployment URL]</a:t>
+              <a:t>karez-20.vercel.app</a:t>
             </a:r>
             <a:endParaRPr lang="en-US" sz="1200" dirty="0"/>
           </a:p>
